--- a/ゲーム科2年/00_前期/ゲーム開発Ⅰ/02_クラスの導入.pptx
+++ b/ゲーム科2年/00_前期/ゲーム開発Ⅰ/02_クラスの導入.pptx
@@ -268,7 +268,7 @@
           <a:p>
             <a:fld id="{E9CC885B-4903-4D54-9A93-00025F12DED9}" type="datetimeFigureOut">
               <a:rPr kumimoji="1" lang="ja-JP" altLang="en-US" smtClean="0"/>
-              <a:t>2024/9/16</a:t>
+              <a:t>2025/1/6</a:t>
             </a:fld>
             <a:endParaRPr kumimoji="1" lang="ja-JP" altLang="en-US"/>
           </a:p>
@@ -498,7 +498,7 @@
           <a:p>
             <a:fld id="{E9CC885B-4903-4D54-9A93-00025F12DED9}" type="datetimeFigureOut">
               <a:rPr kumimoji="1" lang="ja-JP" altLang="en-US" smtClean="0"/>
-              <a:t>2024/9/16</a:t>
+              <a:t>2025/1/6</a:t>
             </a:fld>
             <a:endParaRPr kumimoji="1" lang="ja-JP" altLang="en-US"/>
           </a:p>
@@ -738,7 +738,7 @@
           <a:p>
             <a:fld id="{E9CC885B-4903-4D54-9A93-00025F12DED9}" type="datetimeFigureOut">
               <a:rPr kumimoji="1" lang="ja-JP" altLang="en-US" smtClean="0"/>
-              <a:t>2024/9/16</a:t>
+              <a:t>2025/1/6</a:t>
             </a:fld>
             <a:endParaRPr kumimoji="1" lang="ja-JP" altLang="en-US"/>
           </a:p>
@@ -968,7 +968,7 @@
           <a:p>
             <a:fld id="{E9CC885B-4903-4D54-9A93-00025F12DED9}" type="datetimeFigureOut">
               <a:rPr kumimoji="1" lang="ja-JP" altLang="en-US" smtClean="0"/>
-              <a:t>2024/9/16</a:t>
+              <a:t>2025/1/6</a:t>
             </a:fld>
             <a:endParaRPr kumimoji="1" lang="ja-JP" altLang="en-US"/>
           </a:p>
@@ -1243,7 +1243,7 @@
           <a:p>
             <a:fld id="{E9CC885B-4903-4D54-9A93-00025F12DED9}" type="datetimeFigureOut">
               <a:rPr kumimoji="1" lang="ja-JP" altLang="en-US" smtClean="0"/>
-              <a:t>2024/9/16</a:t>
+              <a:t>2025/1/6</a:t>
             </a:fld>
             <a:endParaRPr kumimoji="1" lang="ja-JP" altLang="en-US"/>
           </a:p>
@@ -1572,7 +1572,7 @@
           <a:p>
             <a:fld id="{E9CC885B-4903-4D54-9A93-00025F12DED9}" type="datetimeFigureOut">
               <a:rPr kumimoji="1" lang="ja-JP" altLang="en-US" smtClean="0"/>
-              <a:t>2024/9/16</a:t>
+              <a:t>2025/1/6</a:t>
             </a:fld>
             <a:endParaRPr kumimoji="1" lang="ja-JP" altLang="en-US"/>
           </a:p>
@@ -2048,7 +2048,7 @@
           <a:p>
             <a:fld id="{E9CC885B-4903-4D54-9A93-00025F12DED9}" type="datetimeFigureOut">
               <a:rPr kumimoji="1" lang="ja-JP" altLang="en-US" smtClean="0"/>
-              <a:t>2024/9/16</a:t>
+              <a:t>2025/1/6</a:t>
             </a:fld>
             <a:endParaRPr kumimoji="1" lang="ja-JP" altLang="en-US"/>
           </a:p>
@@ -2189,7 +2189,7 @@
           <a:p>
             <a:fld id="{E9CC885B-4903-4D54-9A93-00025F12DED9}" type="datetimeFigureOut">
               <a:rPr kumimoji="1" lang="ja-JP" altLang="en-US" smtClean="0"/>
-              <a:t>2024/9/16</a:t>
+              <a:t>2025/1/6</a:t>
             </a:fld>
             <a:endParaRPr kumimoji="1" lang="ja-JP" altLang="en-US"/>
           </a:p>
@@ -2302,7 +2302,7 @@
           <a:p>
             <a:fld id="{E9CC885B-4903-4D54-9A93-00025F12DED9}" type="datetimeFigureOut">
               <a:rPr kumimoji="1" lang="ja-JP" altLang="en-US" smtClean="0"/>
-              <a:t>2024/9/16</a:t>
+              <a:t>2025/1/6</a:t>
             </a:fld>
             <a:endParaRPr kumimoji="1" lang="ja-JP" altLang="en-US"/>
           </a:p>
@@ -2645,7 +2645,7 @@
           <a:p>
             <a:fld id="{E9CC885B-4903-4D54-9A93-00025F12DED9}" type="datetimeFigureOut">
               <a:rPr kumimoji="1" lang="ja-JP" altLang="en-US" smtClean="0"/>
-              <a:t>2024/9/16</a:t>
+              <a:t>2025/1/6</a:t>
             </a:fld>
             <a:endParaRPr kumimoji="1" lang="ja-JP" altLang="en-US"/>
           </a:p>
@@ -2933,7 +2933,7 @@
           <a:p>
             <a:fld id="{E9CC885B-4903-4D54-9A93-00025F12DED9}" type="datetimeFigureOut">
               <a:rPr kumimoji="1" lang="ja-JP" altLang="en-US" smtClean="0"/>
-              <a:t>2024/9/16</a:t>
+              <a:t>2025/1/6</a:t>
             </a:fld>
             <a:endParaRPr kumimoji="1" lang="ja-JP" altLang="en-US"/>
           </a:p>
@@ -3206,7 +3206,7 @@
           <a:p>
             <a:fld id="{E9CC885B-4903-4D54-9A93-00025F12DED9}" type="datetimeFigureOut">
               <a:rPr kumimoji="1" lang="ja-JP" altLang="en-US" smtClean="0"/>
-              <a:t>2024/9/16</a:t>
+              <a:t>2025/1/6</a:t>
             </a:fld>
             <a:endParaRPr kumimoji="1" lang="ja-JP" altLang="en-US"/>
           </a:p>
@@ -3889,7 +3889,11 @@
           <a:lstStyle/>
           <a:p>
             <a:r>
-              <a:rPr lang="en-US" altLang="ja-JP" sz="2400" dirty="0"/>
+              <a:rPr lang="en-US" altLang="ja-JP" sz="2400" b="1" dirty="0">
+                <a:solidFill>
+                  <a:srgbClr val="FF0000"/>
+                </a:solidFill>
+              </a:rPr>
               <a:t>Camera.cpp/.h</a:t>
             </a:r>
             <a:r>
@@ -3900,7 +3904,11 @@
           </a:p>
           <a:p>
             <a:r>
-              <a:rPr lang="en-US" altLang="ja-JP" sz="2400" dirty="0"/>
+              <a:rPr lang="en-US" altLang="ja-JP" sz="2400" b="1" dirty="0">
+                <a:solidFill>
+                  <a:srgbClr val="00B050"/>
+                </a:solidFill>
+              </a:rPr>
               <a:t>Player</a:t>
             </a:r>
             <a:r>
@@ -3992,7 +4000,7 @@
         <p:spPr>
           <a:xfrm>
             <a:off x="567542" y="1216429"/>
-            <a:ext cx="8201284" cy="830997"/>
+            <a:ext cx="8319906" cy="830997"/>
           </a:xfrm>
           <a:prstGeom prst="rect">
             <a:avLst/>
@@ -4013,15 +4021,31 @@
           </a:p>
           <a:p>
             <a:r>
-              <a:rPr lang="en-US" altLang="ja-JP" sz="2400" dirty="0"/>
+              <a:rPr lang="en-US" altLang="ja-JP" sz="2400" b="1" dirty="0">
+                <a:solidFill>
+                  <a:srgbClr val="00B050"/>
+                </a:solidFill>
+              </a:rPr>
               <a:t>Player</a:t>
             </a:r>
             <a:r>
+              <a:rPr lang="ja-JP" altLang="en-US" sz="2400" b="1" dirty="0">
+                <a:solidFill>
+                  <a:srgbClr val="00B050"/>
+                </a:solidFill>
+              </a:rPr>
+              <a:t>フォルダ</a:t>
+            </a:r>
+            <a:r>
               <a:rPr lang="ja-JP" altLang="en-US" sz="2400" dirty="0"/>
-              <a:t>フォルダを作り、</a:t>
-            </a:r>
-            <a:r>
-              <a:rPr lang="en-US" altLang="ja-JP" sz="2400" dirty="0"/>
+              <a:t>を作り、</a:t>
+            </a:r>
+            <a:r>
+              <a:rPr lang="en-US" altLang="ja-JP" sz="2400" b="1" dirty="0">
+                <a:solidFill>
+                  <a:srgbClr val="FF0000"/>
+                </a:solidFill>
+              </a:rPr>
               <a:t>Player.cpp/.h</a:t>
             </a:r>
             <a:r>
@@ -4149,7 +4173,7 @@
         <p:spPr>
           <a:xfrm>
             <a:off x="567542" y="1216429"/>
-            <a:ext cx="4719562" cy="461665"/>
+            <a:ext cx="4793300" cy="461665"/>
           </a:xfrm>
           <a:prstGeom prst="rect">
             <a:avLst/>
@@ -4163,7 +4187,11 @@
           <a:lstStyle/>
           <a:p>
             <a:r>
-              <a:rPr kumimoji="1" lang="en-US" altLang="ja-JP" sz="2400" dirty="0" err="1"/>
+              <a:rPr kumimoji="1" lang="en-US" altLang="ja-JP" sz="2400" b="1" dirty="0" err="1">
+                <a:solidFill>
+                  <a:srgbClr val="FF0000"/>
+                </a:solidFill>
+              </a:rPr>
               <a:t>Player.h</a:t>
             </a:r>
             <a:r>
@@ -4291,7 +4319,7 @@
         <p:spPr>
           <a:xfrm>
             <a:off x="567542" y="1216429"/>
-            <a:ext cx="5363969" cy="461665"/>
+            <a:ext cx="5458546" cy="461665"/>
           </a:xfrm>
           <a:prstGeom prst="rect">
             <a:avLst/>
@@ -4305,7 +4333,11 @@
           <a:lstStyle/>
           <a:p>
             <a:r>
-              <a:rPr lang="en-US" altLang="ja-JP" sz="2400" dirty="0"/>
+              <a:rPr lang="en-US" altLang="ja-JP" sz="2400" b="1" dirty="0">
+                <a:solidFill>
+                  <a:srgbClr val="FF0000"/>
+                </a:solidFill>
+              </a:rPr>
               <a:t>Player.cpp</a:t>
             </a:r>
             <a:r>
@@ -4433,7 +4465,7 @@
         <p:spPr>
           <a:xfrm>
             <a:off x="567542" y="1216429"/>
-            <a:ext cx="2593980" cy="461665"/>
+            <a:ext cx="2688557" cy="461665"/>
           </a:xfrm>
           <a:prstGeom prst="rect">
             <a:avLst/>
@@ -4447,7 +4479,11 @@
           <a:lstStyle/>
           <a:p>
             <a:r>
-              <a:rPr lang="en-US" altLang="ja-JP" sz="2400" dirty="0"/>
+              <a:rPr lang="en-US" altLang="ja-JP" sz="2400" b="1" dirty="0">
+                <a:solidFill>
+                  <a:srgbClr val="FF0000"/>
+                </a:solidFill>
+              </a:rPr>
               <a:t>Player.cpp</a:t>
             </a:r>
             <a:r>
@@ -4575,7 +4611,7 @@
         <p:spPr>
           <a:xfrm>
             <a:off x="567542" y="1216429"/>
-            <a:ext cx="2593980" cy="461665"/>
+            <a:ext cx="2688557" cy="461665"/>
           </a:xfrm>
           <a:prstGeom prst="rect">
             <a:avLst/>
@@ -4589,7 +4625,11 @@
           <a:lstStyle/>
           <a:p>
             <a:r>
-              <a:rPr lang="en-US" altLang="ja-JP" sz="2400" dirty="0"/>
+              <a:rPr lang="en-US" altLang="ja-JP" sz="2400" b="1" dirty="0">
+                <a:solidFill>
+                  <a:srgbClr val="FF0000"/>
+                </a:solidFill>
+              </a:rPr>
               <a:t>Player.cpp</a:t>
             </a:r>
             <a:r>
@@ -4731,7 +4771,11 @@
           <a:lstStyle/>
           <a:p>
             <a:r>
-              <a:rPr lang="en-US" altLang="ja-JP" sz="2400" dirty="0"/>
+              <a:rPr lang="en-US" altLang="ja-JP" sz="2400" b="1" dirty="0">
+                <a:solidFill>
+                  <a:srgbClr val="FF0000"/>
+                </a:solidFill>
+              </a:rPr>
               <a:t>Main.cpp</a:t>
             </a:r>
             <a:r>

--- a/ゲーム科2年/00_前期/ゲーム開発Ⅰ/02_クラスの導入.pptx
+++ b/ゲーム科2年/00_前期/ゲーム開発Ⅰ/02_クラスの導入.pptx
@@ -268,7 +268,7 @@
           <a:p>
             <a:fld id="{E9CC885B-4903-4D54-9A93-00025F12DED9}" type="datetimeFigureOut">
               <a:rPr kumimoji="1" lang="ja-JP" altLang="en-US" smtClean="0"/>
-              <a:t>2025/1/6</a:t>
+              <a:t>2025/2/7</a:t>
             </a:fld>
             <a:endParaRPr kumimoji="1" lang="ja-JP" altLang="en-US"/>
           </a:p>
@@ -498,7 +498,7 @@
           <a:p>
             <a:fld id="{E9CC885B-4903-4D54-9A93-00025F12DED9}" type="datetimeFigureOut">
               <a:rPr kumimoji="1" lang="ja-JP" altLang="en-US" smtClean="0"/>
-              <a:t>2025/1/6</a:t>
+              <a:t>2025/2/7</a:t>
             </a:fld>
             <a:endParaRPr kumimoji="1" lang="ja-JP" altLang="en-US"/>
           </a:p>
@@ -738,7 +738,7 @@
           <a:p>
             <a:fld id="{E9CC885B-4903-4D54-9A93-00025F12DED9}" type="datetimeFigureOut">
               <a:rPr kumimoji="1" lang="ja-JP" altLang="en-US" smtClean="0"/>
-              <a:t>2025/1/6</a:t>
+              <a:t>2025/2/7</a:t>
             </a:fld>
             <a:endParaRPr kumimoji="1" lang="ja-JP" altLang="en-US"/>
           </a:p>
@@ -968,7 +968,7 @@
           <a:p>
             <a:fld id="{E9CC885B-4903-4D54-9A93-00025F12DED9}" type="datetimeFigureOut">
               <a:rPr kumimoji="1" lang="ja-JP" altLang="en-US" smtClean="0"/>
-              <a:t>2025/1/6</a:t>
+              <a:t>2025/2/7</a:t>
             </a:fld>
             <a:endParaRPr kumimoji="1" lang="ja-JP" altLang="en-US"/>
           </a:p>
@@ -1243,7 +1243,7 @@
           <a:p>
             <a:fld id="{E9CC885B-4903-4D54-9A93-00025F12DED9}" type="datetimeFigureOut">
               <a:rPr kumimoji="1" lang="ja-JP" altLang="en-US" smtClean="0"/>
-              <a:t>2025/1/6</a:t>
+              <a:t>2025/2/7</a:t>
             </a:fld>
             <a:endParaRPr kumimoji="1" lang="ja-JP" altLang="en-US"/>
           </a:p>
@@ -1572,7 +1572,7 @@
           <a:p>
             <a:fld id="{E9CC885B-4903-4D54-9A93-00025F12DED9}" type="datetimeFigureOut">
               <a:rPr kumimoji="1" lang="ja-JP" altLang="en-US" smtClean="0"/>
-              <a:t>2025/1/6</a:t>
+              <a:t>2025/2/7</a:t>
             </a:fld>
             <a:endParaRPr kumimoji="1" lang="ja-JP" altLang="en-US"/>
           </a:p>
@@ -2048,7 +2048,7 @@
           <a:p>
             <a:fld id="{E9CC885B-4903-4D54-9A93-00025F12DED9}" type="datetimeFigureOut">
               <a:rPr kumimoji="1" lang="ja-JP" altLang="en-US" smtClean="0"/>
-              <a:t>2025/1/6</a:t>
+              <a:t>2025/2/7</a:t>
             </a:fld>
             <a:endParaRPr kumimoji="1" lang="ja-JP" altLang="en-US"/>
           </a:p>
@@ -2189,7 +2189,7 @@
           <a:p>
             <a:fld id="{E9CC885B-4903-4D54-9A93-00025F12DED9}" type="datetimeFigureOut">
               <a:rPr kumimoji="1" lang="ja-JP" altLang="en-US" smtClean="0"/>
-              <a:t>2025/1/6</a:t>
+              <a:t>2025/2/7</a:t>
             </a:fld>
             <a:endParaRPr kumimoji="1" lang="ja-JP" altLang="en-US"/>
           </a:p>
@@ -2302,7 +2302,7 @@
           <a:p>
             <a:fld id="{E9CC885B-4903-4D54-9A93-00025F12DED9}" type="datetimeFigureOut">
               <a:rPr kumimoji="1" lang="ja-JP" altLang="en-US" smtClean="0"/>
-              <a:t>2025/1/6</a:t>
+              <a:t>2025/2/7</a:t>
             </a:fld>
             <a:endParaRPr kumimoji="1" lang="ja-JP" altLang="en-US"/>
           </a:p>
@@ -2645,7 +2645,7 @@
           <a:p>
             <a:fld id="{E9CC885B-4903-4D54-9A93-00025F12DED9}" type="datetimeFigureOut">
               <a:rPr kumimoji="1" lang="ja-JP" altLang="en-US" smtClean="0"/>
-              <a:t>2025/1/6</a:t>
+              <a:t>2025/2/7</a:t>
             </a:fld>
             <a:endParaRPr kumimoji="1" lang="ja-JP" altLang="en-US"/>
           </a:p>
@@ -2933,7 +2933,7 @@
           <a:p>
             <a:fld id="{E9CC885B-4903-4D54-9A93-00025F12DED9}" type="datetimeFigureOut">
               <a:rPr kumimoji="1" lang="ja-JP" altLang="en-US" smtClean="0"/>
-              <a:t>2025/1/6</a:t>
+              <a:t>2025/2/7</a:t>
             </a:fld>
             <a:endParaRPr kumimoji="1" lang="ja-JP" altLang="en-US"/>
           </a:p>
@@ -3206,7 +3206,7 @@
           <a:p>
             <a:fld id="{E9CC885B-4903-4D54-9A93-00025F12DED9}" type="datetimeFigureOut">
               <a:rPr kumimoji="1" lang="ja-JP" altLang="en-US" smtClean="0"/>
-              <a:t>2025/1/6</a:t>
+              <a:t>2025/2/7</a:t>
             </a:fld>
             <a:endParaRPr kumimoji="1" lang="ja-JP" altLang="en-US"/>
           </a:p>
@@ -3767,7 +3767,7 @@
                   <a:srgbClr val="FF0000"/>
                 </a:solidFill>
               </a:rPr>
-              <a:t>冗長的な繰り返しを無くしたりする</a:t>
+              <a:t>冗長な繰り返しを無くしたりする</a:t>
             </a:r>
             <a:r>
               <a:rPr lang="ja-JP" altLang="en-US" sz="2400" dirty="0"/>

--- a/ゲーム科2年/00_前期/ゲーム開発Ⅰ/02_クラスの導入.pptx
+++ b/ゲーム科2年/00_前期/ゲーム開発Ⅰ/02_クラスの導入.pptx
@@ -268,7 +268,7 @@
           <a:p>
             <a:fld id="{E9CC885B-4903-4D54-9A93-00025F12DED9}" type="datetimeFigureOut">
               <a:rPr kumimoji="1" lang="ja-JP" altLang="en-US" smtClean="0"/>
-              <a:t>2025/2/7</a:t>
+              <a:t>2025/4/7</a:t>
             </a:fld>
             <a:endParaRPr kumimoji="1" lang="ja-JP" altLang="en-US"/>
           </a:p>
@@ -498,7 +498,7 @@
           <a:p>
             <a:fld id="{E9CC885B-4903-4D54-9A93-00025F12DED9}" type="datetimeFigureOut">
               <a:rPr kumimoji="1" lang="ja-JP" altLang="en-US" smtClean="0"/>
-              <a:t>2025/2/7</a:t>
+              <a:t>2025/4/7</a:t>
             </a:fld>
             <a:endParaRPr kumimoji="1" lang="ja-JP" altLang="en-US"/>
           </a:p>
@@ -738,7 +738,7 @@
           <a:p>
             <a:fld id="{E9CC885B-4903-4D54-9A93-00025F12DED9}" type="datetimeFigureOut">
               <a:rPr kumimoji="1" lang="ja-JP" altLang="en-US" smtClean="0"/>
-              <a:t>2025/2/7</a:t>
+              <a:t>2025/4/7</a:t>
             </a:fld>
             <a:endParaRPr kumimoji="1" lang="ja-JP" altLang="en-US"/>
           </a:p>
@@ -968,7 +968,7 @@
           <a:p>
             <a:fld id="{E9CC885B-4903-4D54-9A93-00025F12DED9}" type="datetimeFigureOut">
               <a:rPr kumimoji="1" lang="ja-JP" altLang="en-US" smtClean="0"/>
-              <a:t>2025/2/7</a:t>
+              <a:t>2025/4/7</a:t>
             </a:fld>
             <a:endParaRPr kumimoji="1" lang="ja-JP" altLang="en-US"/>
           </a:p>
@@ -1243,7 +1243,7 @@
           <a:p>
             <a:fld id="{E9CC885B-4903-4D54-9A93-00025F12DED9}" type="datetimeFigureOut">
               <a:rPr kumimoji="1" lang="ja-JP" altLang="en-US" smtClean="0"/>
-              <a:t>2025/2/7</a:t>
+              <a:t>2025/4/7</a:t>
             </a:fld>
             <a:endParaRPr kumimoji="1" lang="ja-JP" altLang="en-US"/>
           </a:p>
@@ -1572,7 +1572,7 @@
           <a:p>
             <a:fld id="{E9CC885B-4903-4D54-9A93-00025F12DED9}" type="datetimeFigureOut">
               <a:rPr kumimoji="1" lang="ja-JP" altLang="en-US" smtClean="0"/>
-              <a:t>2025/2/7</a:t>
+              <a:t>2025/4/7</a:t>
             </a:fld>
             <a:endParaRPr kumimoji="1" lang="ja-JP" altLang="en-US"/>
           </a:p>
@@ -2048,7 +2048,7 @@
           <a:p>
             <a:fld id="{E9CC885B-4903-4D54-9A93-00025F12DED9}" type="datetimeFigureOut">
               <a:rPr kumimoji="1" lang="ja-JP" altLang="en-US" smtClean="0"/>
-              <a:t>2025/2/7</a:t>
+              <a:t>2025/4/7</a:t>
             </a:fld>
             <a:endParaRPr kumimoji="1" lang="ja-JP" altLang="en-US"/>
           </a:p>
@@ -2189,7 +2189,7 @@
           <a:p>
             <a:fld id="{E9CC885B-4903-4D54-9A93-00025F12DED9}" type="datetimeFigureOut">
               <a:rPr kumimoji="1" lang="ja-JP" altLang="en-US" smtClean="0"/>
-              <a:t>2025/2/7</a:t>
+              <a:t>2025/4/7</a:t>
             </a:fld>
             <a:endParaRPr kumimoji="1" lang="ja-JP" altLang="en-US"/>
           </a:p>
@@ -2302,7 +2302,7 @@
           <a:p>
             <a:fld id="{E9CC885B-4903-4D54-9A93-00025F12DED9}" type="datetimeFigureOut">
               <a:rPr kumimoji="1" lang="ja-JP" altLang="en-US" smtClean="0"/>
-              <a:t>2025/2/7</a:t>
+              <a:t>2025/4/7</a:t>
             </a:fld>
             <a:endParaRPr kumimoji="1" lang="ja-JP" altLang="en-US"/>
           </a:p>
@@ -2645,7 +2645,7 @@
           <a:p>
             <a:fld id="{E9CC885B-4903-4D54-9A93-00025F12DED9}" type="datetimeFigureOut">
               <a:rPr kumimoji="1" lang="ja-JP" altLang="en-US" smtClean="0"/>
-              <a:t>2025/2/7</a:t>
+              <a:t>2025/4/7</a:t>
             </a:fld>
             <a:endParaRPr kumimoji="1" lang="ja-JP" altLang="en-US"/>
           </a:p>
@@ -2933,7 +2933,7 @@
           <a:p>
             <a:fld id="{E9CC885B-4903-4D54-9A93-00025F12DED9}" type="datetimeFigureOut">
               <a:rPr kumimoji="1" lang="ja-JP" altLang="en-US" smtClean="0"/>
-              <a:t>2025/2/7</a:t>
+              <a:t>2025/4/7</a:t>
             </a:fld>
             <a:endParaRPr kumimoji="1" lang="ja-JP" altLang="en-US"/>
           </a:p>
@@ -3206,7 +3206,7 @@
           <a:p>
             <a:fld id="{E9CC885B-4903-4D54-9A93-00025F12DED9}" type="datetimeFigureOut">
               <a:rPr kumimoji="1" lang="ja-JP" altLang="en-US" smtClean="0"/>
-              <a:t>2025/2/7</a:t>
+              <a:t>2025/4/7</a:t>
             </a:fld>
             <a:endParaRPr kumimoji="1" lang="ja-JP" altLang="en-US"/>
           </a:p>
@@ -4496,10 +4496,10 @@
       </p:sp>
       <p:pic>
         <p:nvPicPr>
-          <p:cNvPr id="5" name="図 4">
-            <a:extLst>
-              <a:ext uri="{FF2B5EF4-FFF2-40B4-BE49-F238E27FC236}">
-                <a16:creationId xmlns:a16="http://schemas.microsoft.com/office/drawing/2014/main" id="{21840F34-06CC-4C33-B2B4-47E4AA9A3104}"/>
+          <p:cNvPr id="3" name="図 2">
+            <a:extLst>
+              <a:ext uri="{FF2B5EF4-FFF2-40B4-BE49-F238E27FC236}">
+                <a16:creationId xmlns:a16="http://schemas.microsoft.com/office/drawing/2014/main" id="{AEA0D0E9-3D7A-4A25-9A31-5DA6781F85A2}"/>
               </a:ext>
             </a:extLst>
           </p:cNvPr>
@@ -4509,13 +4509,7 @@
           <p:nvPr/>
         </p:nvPicPr>
         <p:blipFill>
-          <a:blip r:embed="rId2">
-            <a:extLst>
-              <a:ext uri="{28A0092B-C50C-407E-A947-70E740481C1C}">
-                <a14:useLocalDpi xmlns:a14="http://schemas.microsoft.com/office/drawing/2010/main" val="0"/>
-              </a:ext>
-            </a:extLst>
-          </a:blip>
+          <a:blip r:embed="rId2"/>
           <a:stretch>
             <a:fillRect/>
           </a:stretch>
@@ -4523,7 +4517,7 @@
         <p:spPr>
           <a:xfrm>
             <a:off x="567542" y="1817794"/>
-            <a:ext cx="6937842" cy="4548252"/>
+            <a:ext cx="7038947" cy="4719640"/>
           </a:xfrm>
           <a:prstGeom prst="rect">
             <a:avLst/>
